--- a/backend/data/attachments/trust_asset_report_5.pptx
+++ b/backend/data/attachments/trust_asset_report_5.pptx
@@ -3188,17 +3188,17 @@
           <a:lstStyle/>
           <a:p>
             <a:r>
-              <a:t>Scale: 324 million RMB</a:t>
-            </a:r>
-          </a:p>
-          <a:p>
-            <a:r>
-              <a:t>Duration: 12 months</a:t>
-            </a:r>
-          </a:p>
-          <a:p>
-            <a:r>
-              <a:t>Expected Return: 8.4% p.a.</a:t>
+              <a:t>Scale: 143.6 million RMB</a:t>
+            </a:r>
+          </a:p>
+          <a:p>
+            <a:r>
+              <a:t>Duration: 24个月</a:t>
+            </a:r>
+          </a:p>
+          <a:p>
+            <a:r>
+              <a:t>Expected Return: 5.49% p.a.</a:t>
             </a:r>
           </a:p>
         </p:txBody>
@@ -3258,17 +3258,17 @@
           <a:lstStyle/>
           <a:p>
             <a:r>
-              <a:t>Senior Tranche: 72%</a:t>
-            </a:r>
-          </a:p>
-          <a:p>
-            <a:r>
-              <a:t>Subordinate Tranche: 22%</a:t>
-            </a:r>
-          </a:p>
-          <a:p>
-            <a:r>
-              <a:t>Risk Mitigation: Land mortgage + Equity pledge</a:t>
+              <a:t>Senior Tranche: 64%</a:t>
+            </a:r>
+          </a:p>
+          <a:p>
+            <a:r>
+              <a:t>Subordinate Tranche: 40%</a:t>
+            </a:r>
+          </a:p>
+          <a:p>
+            <a:r>
+              <a:t>Risk Mitigation: 优先/劣后结构化设计</a:t>
             </a:r>
           </a:p>
         </p:txBody>
@@ -3333,12 +3333,12 @@
           </a:p>
           <a:p>
             <a:r>
-              <a:t>LTV Ratio: 49%</a:t>
-            </a:r>
-          </a:p>
-          <a:p>
-            <a:r>
-              <a:t>Debt Service Coverage: 1.9x</a:t>
+              <a:t>LTV Ratio: 52%</a:t>
+            </a:r>
+          </a:p>
+          <a:p>
+            <a:r>
+              <a:t>Debt Service Coverage: 1.3x</a:t>
             </a:r>
           </a:p>
         </p:txBody>
